--- a/Slides/Semana 11/semana_11_slides.pptx
+++ b/Slides/Semana 11/semana_11_slides.pptx
@@ -889,7 +889,7 @@
 - "Se algo der errado no dia da Execução, qual é o plano B?"
 - "O checklist cobre o espaço real onde a atividade vai acontecer, ou só o planejamento genérico?"
 Avaliação nesta semana: encerramento do ciclo de observação da Etapa de Preparação (Semanas 8–11), segundo a Rubrica de Avaliação. Observa-se Planejamento (coerência entre o planejado na Etapa 2 e o que está pronto), Gestão do Projeto (identificação de riscos remanescentes e comunicação objetiva no checkpoint), início de Execução (qualidade do ensaio geral e disponibilidade dos materiais) e Trabalho em Equipe (distribuição de responsabilidades no ensaio e na consolidação do checklist).
-Fonte: Plano Semanal Semana 11, Cronograma, CLAUDE.md, COURSE_CONTEXT.md, PEDAGOGICAL_RULES.md, EXTENSION_PROJECT_GUIDE.md.</a:t>
+Fonte: Plano Semanal Semana 11, Cronograma.</a:t>
             </a:r>
             <a:endParaRPr lang="en-US" dirty="0"/>
           </a:p>
